--- a/public/fun/pack/pptx/talkpro/발표템플릿프리미엄_13_업무보고_오팔펄.pptx
+++ b/public/fun/pack/pptx/talkpro/발표템플릿프리미엄_13_업무보고_오팔펄.pptx
@@ -115,12 +115,12 @@
   <p:extLst>
     <p:ext uri="{521415D9-36F7-43E2-AB2F-B90AF26B5E84}">
       <p14:sectionLst xmlns:p14="http://schemas.microsoft.com/office/powerpoint/2010/main">
-        <p14:section name="시작" id="{1CE30B94-6E39-4293-9BD4-18B1DBAB8AB8}">
+        <p14:section name="시작" id="{5E16AB0A-E891-44D4-9C7B-3B72E03168B9}">
           <p14:sldIdLst>
             <p14:sldId id="256"/>
           </p14:sldIdLst>
         </p14:section>
-        <p14:section name="본문" id="{87A67A34-D8ED-496E-BAF7-FDD40749F2CF}">
+        <p14:section name="본문" id="{13DEC49E-6EE7-4FF3-A5B5-470E3C533DA7}">
           <p14:sldIdLst>
             <p14:sldId id="257"/>
             <p14:sldId id="258"/>
@@ -131,7 +131,7 @@
             <p14:sldId id="263"/>
           </p14:sldIdLst>
         </p14:section>
-        <p14:section name="마무리" id="{1ADCC1B8-4902-4395-AA0F-BBE7B3C5332D}">
+        <p14:section name="마무리" id="{67729372-47DA-4338-9A91-6B49E0B50B77}">
           <p14:sldIdLst>
             <p14:sldId id="264"/>
           </p14:sldIdLst>
@@ -1934,7 +1934,7 @@
             </a:lvl1pPr>
           </a:lstStyle>
           <a:p>
-            <a:fld id="{2432F9E8-CA8E-4358-B918-ECE063DD4C03}" type="slidenum">
+            <a:fld id="{A28AEE26-1436-4DB0-9FF3-2FD56A2CE826}" type="slidenum">
               <a:rPr lang="en-US"/>
               <a:t>‹#›</a:t>
             </a:fld>
@@ -2639,7 +2639,7 @@
             </a:lvl1pPr>
           </a:lstStyle>
           <a:p>
-            <a:fld id="{1E9B90AB-56A8-4AC3-9744-F5841CBAB264}" type="slidenum">
+            <a:fld id="{47A8ED69-BCF4-41D8-BD4A-AA01C55E94D1}" type="slidenum">
               <a:rPr lang="en-US"/>
               <a:t>‹#›</a:t>
             </a:fld>
@@ -3320,7 +3320,7 @@
             </a:lvl1pPr>
           </a:lstStyle>
           <a:p>
-            <a:fld id="{342BF096-33DD-40CE-9867-4BEFF673A9B5}" type="slidenum">
+            <a:fld id="{BBC56017-1794-4F2B-8636-EEBF99D3D1B4}" type="slidenum">
               <a:rPr lang="en-US"/>
               <a:t>‹#›</a:t>
             </a:fld>
@@ -4211,7 +4211,7 @@
           <a:p>
             <a:r>
               <a:rPr lang="ko-KR"/>
-              <a:t>0000. 00. 00</a:t>
+              <a:t>날짜 입력</a:t>
             </a:r>
           </a:p>
         </p:txBody>
@@ -4296,7 +4296,7 @@
           <a:bodyPr/>
           <a:lstStyle/>
           <a:p>
-            <a:fld id="{74FAA67C-65DF-4305-ACC3-751591E0A539}" type="slidenum">
+            <a:fld id="{44D68B8A-BAB4-4350-B421-7B450630EF63}" type="slidenum">
               <a:rPr lang="en-US"/>
               <a:t>‹#›</a:t>
             </a:fld>
@@ -5398,7 +5398,7 @@
           <a:bodyPr/>
           <a:lstStyle/>
           <a:p>
-            <a:fld id="{20AA1EA3-75D5-47B7-ADC0-D4EF864EBC63}" type="slidenum">
+            <a:fld id="{5129B126-58D2-4DC6-81F1-08204BB13191}" type="slidenum">
               <a:rPr lang="en-US"/>
               <a:t>‹#›</a:t>
             </a:fld>
@@ -5486,7 +5486,7 @@
           <a:bodyPr/>
           <a:lstStyle/>
           <a:p>
-            <a:fld id="{90B70B7B-70AA-49E4-82F7-84C978986A51}" type="slidenum">
+            <a:fld id="{6974A6BD-6C28-486B-BB19-D9E9D21159C6}" type="slidenum">
               <a:rPr lang="en-US"/>
               <a:t>‹#›</a:t>
             </a:fld>
@@ -6384,7 +6384,7 @@
           <a:bodyPr/>
           <a:lstStyle/>
           <a:p>
-            <a:fld id="{FF411CFC-220B-4F10-8A0A-5D3C31000DB3}" type="slidenum">
+            <a:fld id="{CB3812F5-97B0-4466-AF5A-BC4C4DE14516}" type="slidenum">
               <a:rPr lang="en-US"/>
               <a:t>‹#›</a:t>
             </a:fld>
@@ -6982,7 +6982,7 @@
           <a:bodyPr/>
           <a:lstStyle/>
           <a:p>
-            <a:fld id="{C43210F6-79B5-4F0D-96D8-D29D2950923E}" type="slidenum">
+            <a:fld id="{EEC94A02-9548-4E52-B023-D2347251F3B8}" type="slidenum">
               <a:rPr lang="en-US"/>
               <a:t>‹#›</a:t>
             </a:fld>
@@ -7165,7 +7165,7 @@
           <a:bodyPr/>
           <a:lstStyle/>
           <a:p>
-            <a:fld id="{6CC06AAE-A021-4B2F-8600-0D4FB1B1FE89}" type="slidenum">
+            <a:fld id="{BFAC147F-A58D-4CFA-8CC6-9BDF5B27EF24}" type="slidenum">
               <a:rPr lang="en-US"/>
               <a:t>‹#›</a:t>
             </a:fld>
@@ -8229,7 +8229,7 @@
           <a:bodyPr/>
           <a:lstStyle/>
           <a:p>
-            <a:fld id="{03D2D06B-215B-437A-9F4B-369F1ABF34E8}" type="slidenum">
+            <a:fld id="{BB60D04B-2C0F-4F38-B0EA-A904AA0C0D09}" type="slidenum">
               <a:rPr lang="en-US"/>
               <a:t>‹#›</a:t>
             </a:fld>
